--- a/Topic_C/Exam_Practice/TC-L04_Writing_Workshop_Environmental_Problems_Causes.pptx
+++ b/Topic_C/Exam_Practice/TC-L04_Writing_Workshop_Environmental_Problems_Causes.pptx
@@ -784,7 +784,11 @@
           <a:lstStyle/>
           <a:p>
             <a:r>
-              <a:rPr lang="en-US" dirty="0"/>
+              <a:rPr lang="ar-SA" dirty="0">
+                <a:latin typeface="Amiri" pitchFamily="2" charset="-78"/>
+                <a:ea typeface="Amiri" pitchFamily="2" charset="-78"/>
+                <a:cs typeface="Amiri" pitchFamily="2" charset="-78"/>
+              </a:rPr>
               <a:t>Q3 (3 min to choose and read). Title (أ) suits Core and Develop; title (ب) suits Stretch.</a:t>
             </a:r>
             <a:endParaRPr lang="en-US" dirty="0"/>
@@ -1403,7 +1407,11 @@
           <a:lstStyle/>
           <a:p>
             <a:r>
-              <a:rPr lang="en-US" dirty="0"/>
+              <a:rPr lang="ar-SA" dirty="0">
+                <a:latin typeface="Amiri" pitchFamily="2" charset="-78"/>
+                <a:ea typeface="Amiri" pitchFamily="2" charset="-78"/>
+                <a:cs typeface="Amiri" pitchFamily="2" charset="-78"/>
+              </a:rPr>
               <a:t>WELCOME (1 min) — while students join.
 • Greet each student by name as they arrive: السَّلَامُ عَلَيْكُمْ. Take the register (Pastoral Tracker: attendance 0/1).
 • 2-MINUTE CHECK-IN (SEND training): a private chat to any student who seemed unsettled last lesson — “Are you okay today? 👍 / 👎”.
@@ -1936,7 +1944,11 @@
           <a:lstStyle/>
           <a:p>
             <a:r>
-              <a:rPr lang="en-US" dirty="0"/>
+              <a:rPr lang="ar-SA" dirty="0">
+                <a:latin typeface="Amiri" pitchFamily="2" charset="-78"/>
+                <a:ea typeface="Amiri" pitchFamily="2" charset="-78"/>
+                <a:cs typeface="Amiri" pitchFamily="2" charset="-78"/>
+              </a:rPr>
               <a:t>Question words: مَا (what) · أَسْبَابُهَا (its causes) · مُؤَخَّرًا (recently) · اقْتِرَاحُكَ (your suggestion) — bullet 3 is PAST, bullet 4 is FUTURE.</a:t>
             </a:r>
             <a:endParaRPr lang="en-US" dirty="0"/>
@@ -2508,6 +2520,7 @@
                   <a:srgbClr val="D4AF37"/>
                 </a:solidFill>
                 <a:latin typeface="Amiri" pitchFamily="2" charset="-78"/>
+                <a:ea typeface="Amiri" pitchFamily="2" charset="-78"/>
                 <a:cs typeface="Amiri" pitchFamily="2" charset="-78"/>
               </a:rPr>
               <a:t>م</a:t>
@@ -2714,6 +2727,7 @@
                   <a:srgbClr val="D4AF37"/>
                 </a:solidFill>
                 <a:latin typeface="Amiri" pitchFamily="2" charset="-78"/>
+                <a:ea typeface="Amiri" pitchFamily="2" charset="-78"/>
                 <a:cs typeface="Amiri" pitchFamily="2" charset="-78"/>
               </a:rPr>
               <a:t>وَرْشَةُ الكِتَابَةِ — مَشَاكِلُ البِيئَةِ</a:t>
@@ -3171,6 +3185,7 @@
                   <a:srgbClr val="D4AF37"/>
                 </a:solidFill>
                 <a:latin typeface="Amiri" pitchFamily="2" charset="-78"/>
+                <a:ea typeface="Amiri" pitchFamily="2" charset="-78"/>
                 <a:cs typeface="Amiri" pitchFamily="2" charset="-78"/>
               </a:rPr>
               <a:t>م</a:t>
@@ -3491,6 +3506,7 @@
                   <a:srgbClr val="8A6D1E"/>
                 </a:solidFill>
                 <a:latin typeface="Amiri" pitchFamily="2" charset="-78"/>
+                <a:ea typeface="Amiri" pitchFamily="2" charset="-78"/>
                 <a:cs typeface="Amiri" pitchFamily="2" charset="-78"/>
               </a:rPr>
               <a:t>نَمُوذَجُ الإِجَابَةِ</a:t>
@@ -3604,6 +3620,7 @@
                   <a:srgbClr val="1F2A37"/>
                 </a:solidFill>
                 <a:latin typeface="Amiri" pitchFamily="2" charset="-78"/>
+                <a:ea typeface="Amiri" pitchFamily="2" charset="-78"/>
                 <a:cs typeface="Amiri" pitchFamily="2" charset="-78"/>
               </a:rPr>
               <a:t>إِلَى مُدِيرِ المَدْرَسَةِ المُحْتَرَمِ،</a:t>
@@ -3623,6 +3640,7 @@
                   <a:srgbClr val="1F2A37"/>
                 </a:solidFill>
                 <a:latin typeface="Amiri" pitchFamily="2" charset="-78"/>
+                <a:ea typeface="Amiri" pitchFamily="2" charset="-78"/>
                 <a:cs typeface="Amiri" pitchFamily="2" charset="-78"/>
               </a:rPr>
               <a:t>أَنَا طَالِبَةٌ فِي الصَّفِّ العَاشِرِ، وَأَكْتُبُ إِلَيْكَ عَنْ مُشْكِلَةٍ بِيئِيَّةٍ فِي مَدْرَسَتِنَا. المُشْكِلَةُ هِيَ النُّفَايَاتُ البْلَاسْتِيكِيَّةُ؛ فَالمَلْعَبُ وَالمَمَرَّاتُ وَسِخَةٌ بَعْدَ الاسْتِرَاحَةِ. السَّبَبُ أَنَّ سَلَّاتِ المُهْمَلَاتِ قَلِيلَةٌ، وَأَنَّ الطُّلَّابَ يَشْتَرُونَ زُجَاجَاتِ مَاءٍ كُلَّ يَوْمٍ. أَمْسِ رَأَيْتُ طَائِرًا يَأْكُلُ كِيسًا بْلَاسْتِيكِيًّا، وَحَزِنْتُ كَثِيرًا. فِي رَأْيِي، هٰذِهِ مُشْكِلَةٌ خَطِيرَةٌ. أَقْتَرِحُ أَنْ نَضَعَ سَلَّاتٍ لِلتَّدْوِيرِ، وَسَنُنَظِّمُ نَحْنُ يَوْمًا لِلتَّنْظِيفِ.</a:t>
@@ -3642,6 +3660,7 @@
                   <a:srgbClr val="1F2A37"/>
                 </a:solidFill>
                 <a:latin typeface="Amiri" pitchFamily="2" charset="-78"/>
+                <a:ea typeface="Amiri" pitchFamily="2" charset="-78"/>
                 <a:cs typeface="Amiri" pitchFamily="2" charset="-78"/>
               </a:rPr>
               <a:t>مَعَ الشُّكْرِ،</a:t>
@@ -3661,6 +3680,7 @@
                   <a:srgbClr val="1F2A37"/>
                 </a:solidFill>
                 <a:latin typeface="Amiri" pitchFamily="2" charset="-78"/>
+                <a:ea typeface="Amiri" pitchFamily="2" charset="-78"/>
                 <a:cs typeface="Amiri" pitchFamily="2" charset="-78"/>
               </a:rPr>
               <a:t>مَرْيَمُ</a:t>
@@ -3824,11 +3844,12 @@
               <a:buNone/>
             </a:pPr>
             <a:r>
-              <a:rPr lang="en-US" sz="950" b="1" dirty="0">
+              <a:rPr lang="ar-SA" sz="950" b="1" dirty="0">
                 <a:solidFill>
                   <a:srgbClr val="FFFFFF"/>
                 </a:solidFill>
                 <a:latin typeface="Calibri" pitchFamily="34" charset="0"/>
+                <a:ea typeface="Amiri" pitchFamily="2" charset="-78"/>
                 <a:cs typeface="Amiri" pitchFamily="2" charset="-78"/>
               </a:rPr>
               <a:t>مُشْكِلَةٍ بِيئِيَّةٍ</a:t>
@@ -3889,11 +3910,12 @@
               <a:buNone/>
             </a:pPr>
             <a:r>
-              <a:rPr lang="en-US" sz="950" b="1" dirty="0">
+              <a:rPr lang="ar-SA" sz="950" b="1" dirty="0">
                 <a:solidFill>
                   <a:srgbClr val="FFFFFF"/>
                 </a:solidFill>
                 <a:latin typeface="Calibri" pitchFamily="34" charset="0"/>
+                <a:ea typeface="Amiri" pitchFamily="2" charset="-78"/>
                 <a:cs typeface="Amiri" pitchFamily="2" charset="-78"/>
               </a:rPr>
               <a:t>السَّبَبُ أَنَّ</a:t>
@@ -3954,11 +3976,12 @@
               <a:buNone/>
             </a:pPr>
             <a:r>
-              <a:rPr lang="en-US" sz="950" b="1" dirty="0">
+              <a:rPr lang="ar-SA" sz="950" b="1" dirty="0">
                 <a:solidFill>
                   <a:srgbClr val="FFFFFF"/>
                 </a:solidFill>
                 <a:latin typeface="Calibri" pitchFamily="34" charset="0"/>
+                <a:ea typeface="Amiri" pitchFamily="2" charset="-78"/>
                 <a:cs typeface="Amiri" pitchFamily="2" charset="-78"/>
               </a:rPr>
               <a:t>رَأَيْتُ طَائِرًا يَأْكُلُ</a:t>
@@ -4019,11 +4042,12 @@
               <a:buNone/>
             </a:pPr>
             <a:r>
-              <a:rPr lang="en-US" sz="950" b="1" dirty="0">
+              <a:rPr lang="ar-SA" sz="950" b="1" dirty="0">
                 <a:solidFill>
                   <a:srgbClr val="FFFFFF"/>
                 </a:solidFill>
                 <a:latin typeface="Calibri" pitchFamily="34" charset="0"/>
+                <a:ea typeface="Amiri" pitchFamily="2" charset="-78"/>
                 <a:cs typeface="Amiri" pitchFamily="2" charset="-78"/>
               </a:rPr>
               <a:t>وَسَنُنَظِّمُ</a:t>
@@ -4157,6 +4181,7 @@
                   <a:srgbClr val="D4AF37"/>
                 </a:solidFill>
                 <a:latin typeface="Amiri" pitchFamily="2" charset="-78"/>
+                <a:ea typeface="Amiri" pitchFamily="2" charset="-78"/>
                 <a:cs typeface="Amiri" pitchFamily="2" charset="-78"/>
               </a:rPr>
               <a:t>م</a:t>
@@ -4477,6 +4502,7 @@
                   <a:srgbClr val="8A6D1E"/>
                 </a:solidFill>
                 <a:latin typeface="Amiri" pitchFamily="2" charset="-78"/>
+                <a:ea typeface="Amiri" pitchFamily="2" charset="-78"/>
                 <a:cs typeface="Amiri" pitchFamily="2" charset="-78"/>
               </a:rPr>
               <a:t>نَمُوذَجُ الإِجَابَةِ</a:t>
@@ -4590,6 +4616,7 @@
                   <a:srgbClr val="1F2A37"/>
                 </a:solidFill>
                 <a:latin typeface="Amiri" pitchFamily="2" charset="-78"/>
+                <a:ea typeface="Amiri" pitchFamily="2" charset="-78"/>
                 <a:cs typeface="Amiri" pitchFamily="2" charset="-78"/>
               </a:rPr>
               <a:t>حَضْرَةَ مُدِيرِ المَدْرَسَةِ المُحْتَرَمِ،</a:t>
@@ -4609,6 +4636,7 @@
                   <a:srgbClr val="1F2A37"/>
                 </a:solidFill>
                 <a:latin typeface="Amiri" pitchFamily="2" charset="-78"/>
+                <a:ea typeface="Amiri" pitchFamily="2" charset="-78"/>
                 <a:cs typeface="Amiri" pitchFamily="2" charset="-78"/>
               </a:rPr>
               <a:t>تَحِيَّةً طَيِّبَةً، وَبَعْدُ، فَأَكْتُبُ إِلَيْكَ نِيَابَةً عَنْ نَادِي البِيئَةِ لِأُلْفِتَ نَظَرَكَ إِلَى مُشْكِلَةٍ تَزْدَادُ يَوْمًا بَعْدَ يَوْمٍ، وَهِيَ النُّفَايَاتُ البْلَاسْتِيكِيَّةُ الَّتِي تُرْمَى فِي المَلْعَبِ وَالمَمَرَّاتِ. وَيَرْجِعُ السَّبَبُ إِلَى قِلَّةِ السَّلَّاتِ، وَإِلَى بَيْعِ المَاءِ فِي زُجَاجَاتٍ تُسْتَخْدَمُ مَرَّةً وَاحِدَةً فَقَطْ. وَقَدْ لَاحَظْنَا الأُسْبُوعَ المَاضِي أَنَّ الرِّيَاحَ حَمَلَتِ الأَكْيَاسَ إِلَى الحَدِيقَةِ المُجَاوِرَةِ، مِمَّا أَضَرَّ بِالطُّيُورِ وَالسَّنَاجِبِ الَّتِي تَعِيشُ هُنَاكَ. لِذٰلِكَ نَقْتَرِحُ تَرْكِيبَ نَافُورَاتٍ لِلشُّرْبِ وَسَلَّاتٍ لِلتَّدْوِيرِ، وَسَيَتَطَوَّعُ أَعْضَاءُ النَّادِي لِتَوْعِيَةِ الطُّلَّابِ فِي الاسْتِرَاحَاتِ وَالاجْتِمَاعَاتِ الصَّبَاحِيَّةِ.</a:t>
@@ -4628,6 +4656,7 @@
                   <a:srgbClr val="1F2A37"/>
                 </a:solidFill>
                 <a:latin typeface="Amiri" pitchFamily="2" charset="-78"/>
+                <a:ea typeface="Amiri" pitchFamily="2" charset="-78"/>
                 <a:cs typeface="Amiri" pitchFamily="2" charset="-78"/>
               </a:rPr>
               <a:t>وَتَفَضَّلُوا بِقَبُولِ فَائِقِ الاحْتِرَامِ،</a:t>
@@ -4647,6 +4676,7 @@
                   <a:srgbClr val="1F2A37"/>
                 </a:solidFill>
                 <a:latin typeface="Amiri" pitchFamily="2" charset="-78"/>
+                <a:ea typeface="Amiri" pitchFamily="2" charset="-78"/>
                 <a:cs typeface="Amiri" pitchFamily="2" charset="-78"/>
               </a:rPr>
               <a:t>مَرْيَمُ</a:t>
@@ -4810,11 +4840,12 @@
               <a:buNone/>
             </a:pPr>
             <a:r>
-              <a:rPr lang="en-US" sz="950" b="1" dirty="0">
+              <a:rPr lang="ar-SA" sz="950" b="1" dirty="0">
                 <a:solidFill>
                   <a:srgbClr val="FFFFFF"/>
                 </a:solidFill>
                 <a:latin typeface="Calibri" pitchFamily="34" charset="0"/>
+                <a:ea typeface="Amiri" pitchFamily="2" charset="-78"/>
                 <a:cs typeface="Amiri" pitchFamily="2" charset="-78"/>
               </a:rPr>
               <a:t>لِأُلْفِتَ نَظَرَكَ إِلَى</a:t>
@@ -4875,11 +4906,12 @@
               <a:buNone/>
             </a:pPr>
             <a:r>
-              <a:rPr lang="en-US" sz="950" b="1" dirty="0">
+              <a:rPr lang="ar-SA" sz="950" b="1" dirty="0">
                 <a:solidFill>
                   <a:srgbClr val="FFFFFF"/>
                 </a:solidFill>
                 <a:latin typeface="Calibri" pitchFamily="34" charset="0"/>
+                <a:ea typeface="Amiri" pitchFamily="2" charset="-78"/>
                 <a:cs typeface="Amiri" pitchFamily="2" charset="-78"/>
               </a:rPr>
               <a:t>الَّتِي تُرْمَى</a:t>
@@ -4940,11 +4972,12 @@
               <a:buNone/>
             </a:pPr>
             <a:r>
-              <a:rPr lang="en-US" sz="950" b="1" dirty="0">
+              <a:rPr lang="ar-SA" sz="950" b="1" dirty="0">
                 <a:solidFill>
                   <a:srgbClr val="FFFFFF"/>
                 </a:solidFill>
                 <a:latin typeface="Calibri" pitchFamily="34" charset="0"/>
+                <a:ea typeface="Amiri" pitchFamily="2" charset="-78"/>
                 <a:cs typeface="Amiri" pitchFamily="2" charset="-78"/>
               </a:rPr>
               <a:t>يَرْجِعُ السَّبَبُ إِلَى</a:t>
@@ -5005,11 +5038,12 @@
               <a:buNone/>
             </a:pPr>
             <a:r>
-              <a:rPr lang="en-US" sz="950" b="1" dirty="0">
+              <a:rPr lang="ar-SA" sz="950" b="1" dirty="0">
                 <a:solidFill>
                   <a:srgbClr val="FFFFFF"/>
                 </a:solidFill>
                 <a:latin typeface="Calibri" pitchFamily="34" charset="0"/>
+                <a:ea typeface="Amiri" pitchFamily="2" charset="-78"/>
                 <a:cs typeface="Amiri" pitchFamily="2" charset="-78"/>
               </a:rPr>
               <a:t>مِمَّا أَضَرَّ</a:t>
@@ -5143,6 +5177,7 @@
                   <a:srgbClr val="D4AF37"/>
                 </a:solidFill>
                 <a:latin typeface="Amiri" pitchFamily="2" charset="-78"/>
+                <a:ea typeface="Amiri" pitchFamily="2" charset="-78"/>
                 <a:cs typeface="Amiri" pitchFamily="2" charset="-78"/>
               </a:rPr>
               <a:t>م</a:t>
@@ -5463,6 +5498,7 @@
                   <a:srgbClr val="8A6D1E"/>
                 </a:solidFill>
                 <a:latin typeface="Amiri" pitchFamily="2" charset="-78"/>
+                <a:ea typeface="Amiri" pitchFamily="2" charset="-78"/>
                 <a:cs typeface="Amiri" pitchFamily="2" charset="-78"/>
               </a:rPr>
               <a:t>اخْتَرْ عُنْوَانًا وَاحِدًا</a:t>
@@ -5743,6 +5779,7 @@
                   <a:srgbClr val="1B3B6F"/>
                 </a:solidFill>
                 <a:latin typeface="Amiri" pitchFamily="2" charset="-78"/>
+                <a:ea typeface="Amiri" pitchFamily="2" charset="-78"/>
                 <a:cs typeface="Amiri" pitchFamily="2" charset="-78"/>
               </a:rPr>
               <a:t>المَشَاكِلُ البِيئِيَّةُ فِي مَدِينَتِي</a:t>
@@ -5781,6 +5818,7 @@
                   <a:srgbClr val="1B3B6F"/>
                 </a:solidFill>
                 <a:latin typeface="Amiri" pitchFamily="2" charset="-78"/>
+                <a:ea typeface="Amiri" pitchFamily="2" charset="-78"/>
                 <a:cs typeface="Amiri" pitchFamily="2" charset="-78"/>
               </a:rPr>
               <a:t>(أ)</a:t>
@@ -5884,6 +5922,7 @@
                   <a:srgbClr val="1B3B6F"/>
                 </a:solidFill>
                 <a:latin typeface="Amiri" pitchFamily="2" charset="-78"/>
+                <a:ea typeface="Amiri" pitchFamily="2" charset="-78"/>
                 <a:cs typeface="Amiri" pitchFamily="2" charset="-78"/>
               </a:rPr>
               <a:t>المَشَاكِلُ فِي مَدِينَتِكَ · أَسْبَابُهَا وَنَتَائِجُهَا · تَجْرِبَةٌ شَخْصِيَّةٌ · رَأْيُكَ وَمَا سَتَفْعَلُهُ</a:t>
@@ -6015,6 +6054,7 @@
                   <a:srgbClr val="1B3B6F"/>
                 </a:solidFill>
                 <a:latin typeface="Amiri" pitchFamily="2" charset="-78"/>
+                <a:ea typeface="Amiri" pitchFamily="2" charset="-78"/>
                 <a:cs typeface="Amiri" pitchFamily="2" charset="-78"/>
               </a:rPr>
               <a:t>البْلَاسْتِيكُ يُهَدِّدُ البِحَارَ</a:t>
@@ -6053,6 +6093,7 @@
                   <a:srgbClr val="1B3B6F"/>
                 </a:solidFill>
                 <a:latin typeface="Amiri" pitchFamily="2" charset="-78"/>
+                <a:ea typeface="Amiri" pitchFamily="2" charset="-78"/>
                 <a:cs typeface="Amiri" pitchFamily="2" charset="-78"/>
               </a:rPr>
               <a:t>(ب)</a:t>
@@ -6156,6 +6197,7 @@
                   <a:srgbClr val="1B3B6F"/>
                 </a:solidFill>
                 <a:latin typeface="Amiri" pitchFamily="2" charset="-78"/>
+                <a:ea typeface="Amiri" pitchFamily="2" charset="-78"/>
                 <a:cs typeface="Amiri" pitchFamily="2" charset="-78"/>
               </a:rPr>
               <a:t>حَجْمُ المُشْكِلَةِ · المَاضِي وَالحَاضِرُ · مَوْقِفٌ رَأَيْتَهُ · رَأْيُكَ وَالحَلُّ</a:t>
@@ -6355,6 +6397,7 @@
                   <a:srgbClr val="D4AF37"/>
                 </a:solidFill>
                 <a:latin typeface="Amiri" pitchFamily="2" charset="-78"/>
+                <a:ea typeface="Amiri" pitchFamily="2" charset="-78"/>
                 <a:cs typeface="Amiri" pitchFamily="2" charset="-78"/>
               </a:rPr>
               <a:t>م</a:t>
@@ -6675,6 +6718,7 @@
                   <a:srgbClr val="8A6D1E"/>
                 </a:solidFill>
                 <a:latin typeface="Amiri" pitchFamily="2" charset="-78"/>
+                <a:ea typeface="Amiri" pitchFamily="2" charset="-78"/>
                 <a:cs typeface="Amiri" pitchFamily="2" charset="-78"/>
               </a:rPr>
               <a:t>خُطَّةُ الكِتَابَةِ</a:t>
@@ -7299,6 +7343,7 @@
                   <a:srgbClr val="1B3B6F"/>
                 </a:solidFill>
                 <a:latin typeface="Amiri" pitchFamily="2" charset="-78"/>
+                <a:ea typeface="Amiri" pitchFamily="2" charset="-78"/>
                 <a:cs typeface="Amiri" pitchFamily="2" charset="-78"/>
               </a:rPr>
               <a:t>السَّيَّارَاتُ وَالحَافِلَاتُ تُلَوِّثُ الهَوَاءَ.</a:t>
@@ -7398,6 +7443,7 @@
                   <a:srgbClr val="1B3B6F"/>
                 </a:solidFill>
                 <a:latin typeface="Amiri" pitchFamily="2" charset="-78"/>
+                <a:ea typeface="Amiri" pitchFamily="2" charset="-78"/>
                 <a:cs typeface="Amiri" pitchFamily="2" charset="-78"/>
               </a:rPr>
               <a:t>كَانَ المَاءُ وَسِخًا، وَجَمَعْنَا النُّفَايَاتِ.</a:t>
@@ -7497,6 +7543,7 @@
                   <a:srgbClr val="1B3B6F"/>
                 </a:solidFill>
                 <a:latin typeface="Amiri" pitchFamily="2" charset="-78"/>
+                <a:ea typeface="Amiri" pitchFamily="2" charset="-78"/>
                 <a:cs typeface="Amiri" pitchFamily="2" charset="-78"/>
               </a:rPr>
               <a:t>سَأَذْهَبُ إِلَى المَدْرَسَةِ بِالدَّرَّاجَةِ.</a:t>
@@ -7658,6 +7705,7 @@
                   <a:srgbClr val="1F2A37"/>
                 </a:solidFill>
                 <a:latin typeface="Amiri" pitchFamily="2" charset="-78"/>
+                <a:ea typeface="Amiri" pitchFamily="2" charset="-78"/>
                 <a:cs typeface="Amiri" pitchFamily="2" charset="-78"/>
               </a:rPr>
               <a:t>أ</a:t>
@@ -7684,6 +7732,7 @@
                   <a:srgbClr val="1F2A37"/>
                 </a:solidFill>
                 <a:latin typeface="Amiri" pitchFamily="2" charset="-78"/>
+                <a:ea typeface="Amiri" pitchFamily="2" charset="-78"/>
                 <a:cs typeface="Amiri" pitchFamily="2" charset="-78"/>
               </a:rPr>
               <a:t>ب</a:t>
@@ -7830,6 +7879,7 @@
                   <a:srgbClr val="D4AF37"/>
                 </a:solidFill>
                 <a:latin typeface="Amiri" pitchFamily="2" charset="-78"/>
+                <a:ea typeface="Amiri" pitchFamily="2" charset="-78"/>
                 <a:cs typeface="Amiri" pitchFamily="2" charset="-78"/>
               </a:rPr>
               <a:t>م</a:t>
@@ -8087,6 +8137,7 @@
                   <a:srgbClr val="8A6D1E"/>
                 </a:solidFill>
                 <a:latin typeface="Amiri" pitchFamily="2" charset="-78"/>
+                <a:ea typeface="Amiri" pitchFamily="2" charset="-78"/>
                 <a:cs typeface="Amiri" pitchFamily="2" charset="-78"/>
               </a:rPr>
               <a:t>أ</a:t>
@@ -8151,6 +8202,7 @@
                   <a:srgbClr val="1B3B6F"/>
                 </a:solidFill>
                 <a:latin typeface="Amiri" pitchFamily="2" charset="-78"/>
+                <a:ea typeface="Amiri" pitchFamily="2" charset="-78"/>
                 <a:cs typeface="Amiri" pitchFamily="2" charset="-78"/>
               </a:rPr>
               <a:t>أ</a:t>
@@ -8202,6 +8254,7 @@
                   <a:srgbClr val="8A6D1E"/>
                 </a:solidFill>
                 <a:latin typeface="Amiri" pitchFamily="2" charset="-78"/>
+                <a:ea typeface="Amiri" pitchFamily="2" charset="-78"/>
                 <a:cs typeface="Amiri" pitchFamily="2" charset="-78"/>
               </a:rPr>
               <a:t>نَمُوذَجُ الإِجَابَةِ</a:t>
@@ -8315,6 +8368,7 @@
                   <a:srgbClr val="1F2A37"/>
                 </a:solidFill>
                 <a:latin typeface="Amiri" pitchFamily="2" charset="-78"/>
+                <a:ea typeface="Amiri" pitchFamily="2" charset="-78"/>
                 <a:cs typeface="Amiri" pitchFamily="2" charset="-78"/>
               </a:rPr>
               <a:t>فِي مَدِينَتِي مَشَاكِلُ بِيئِيَّةٌ كَثِيرَةٌ. أَكْبَرُ مُشْكِلَةٍ هِيَ زَحْمَةُ المُرُورِ. فِي الصَّبَاحِ الشَّوَارِعُ مُزْدَحِمَةٌ جِدًّا، وَالسَّيَّارَاتُ وَالحَافِلَاتُ تُلَوِّثُ الهَوَاءَ. هُنَاكَ أَيْضًا نُفَايَاتٌ كَثِيرَةٌ فِي الحَدَائِقِ وَالشَّوَارِعِ.</a:t>
@@ -8334,6 +8388,7 @@
                   <a:srgbClr val="1F2A37"/>
                 </a:solidFill>
                 <a:latin typeface="Amiri" pitchFamily="2" charset="-78"/>
+                <a:ea typeface="Amiri" pitchFamily="2" charset="-78"/>
                 <a:cs typeface="Amiri" pitchFamily="2" charset="-78"/>
               </a:rPr>
               <a:t>السَّبَبُ الأَوَّلُ هُوَ أَنَّ النَّاسَ يَسْتَخْدِمُونَ السَّيَّارَاتِ كَثِيرًا. السَّبَبُ الثَّانِي هُوَ أَنَّ بَعْضَ النَّاسِ يَرْمُونَ النُّفَايَاتِ فِي الشَّارِعِ، وَلَا يَسْتَخْدِمُونَ السَّلَّاتِ. هٰذَا يُؤَدِّي إِلَى أَمْرَاضٍ، وَيَضُرُّ بِالحَيَوَانَاتِ وَالطُّيُورِ.</a:t>
@@ -8353,6 +8408,7 @@
                   <a:srgbClr val="1F2A37"/>
                 </a:solidFill>
                 <a:latin typeface="Amiri" pitchFamily="2" charset="-78"/>
+                <a:ea typeface="Amiri" pitchFamily="2" charset="-78"/>
                 <a:cs typeface="Amiri" pitchFamily="2" charset="-78"/>
               </a:rPr>
               <a:t>فِي الشَّهْرِ المَاضِي ذَهَبْتُ مَعَ صَفِّي إِلَى النَّهْرِ. كَانَ المَاءُ وَسِخًا، وَكَانَتْ هُنَاكَ زُجَاجَاتٌ وَأَكْيَاسٌ كَثِيرَةٌ. جَمَعْنَا النُّفَايَاتِ فِي أَكْيَاسٍ كَبِيرَةٍ، وَبَعْدَ ثَلَاثِ سَاعَاتٍ أَصْبَحَ المَكَانُ نَظِيفًا. كُنْتُ سَعِيدَةً جِدًّا، لِأَنَّ عَمَلَنَا كَانَ مُفِيدًا لِلنَّهْرِ وَلِلطُّيُورِ.</a:t>
@@ -8372,6 +8428,7 @@
                   <a:srgbClr val="1F2A37"/>
                 </a:solidFill>
                 <a:latin typeface="Amiri" pitchFamily="2" charset="-78"/>
+                <a:ea typeface="Amiri" pitchFamily="2" charset="-78"/>
                 <a:cs typeface="Amiri" pitchFamily="2" charset="-78"/>
               </a:rPr>
               <a:t>فِي رَأْيِي، البِيئَةُ مُهِمَّةٌ جِدًّا، لِأَنَّهَا بَيْتُنَا جَمِيعًا. فِي المُسْتَقْبَلِ سَأَذْهَبُ إِلَى المَدْرَسَةِ بِالدَّرَّاجَةِ، وَسَأَسْتَخْدِمُ زُجَاجَةَ مَاءٍ وَاحِدَةً كُلَّ يَوْمٍ.</a:t>
@@ -8535,11 +8592,12 @@
               <a:buNone/>
             </a:pPr>
             <a:r>
-              <a:rPr lang="en-US" sz="950" b="1" dirty="0">
+              <a:rPr lang="ar-SA" sz="950" b="1" dirty="0">
                 <a:solidFill>
                   <a:srgbClr val="FFFFFF"/>
                 </a:solidFill>
                 <a:latin typeface="Calibri" pitchFamily="34" charset="0"/>
+                <a:ea typeface="Amiri" pitchFamily="2" charset="-78"/>
                 <a:cs typeface="Amiri" pitchFamily="2" charset="-78"/>
               </a:rPr>
               <a:t>تُلَوِّثُ الهَوَاءَ</a:t>
@@ -8600,11 +8658,12 @@
               <a:buNone/>
             </a:pPr>
             <a:r>
-              <a:rPr lang="en-US" sz="950" b="1" dirty="0">
+              <a:rPr lang="ar-SA" sz="950" b="1" dirty="0">
                 <a:solidFill>
                   <a:srgbClr val="FFFFFF"/>
                 </a:solidFill>
                 <a:latin typeface="Calibri" pitchFamily="34" charset="0"/>
+                <a:ea typeface="Amiri" pitchFamily="2" charset="-78"/>
                 <a:cs typeface="Amiri" pitchFamily="2" charset="-78"/>
               </a:rPr>
               <a:t>السَّبَبُ الأَوَّلُ</a:t>
@@ -8665,11 +8724,12 @@
               <a:buNone/>
             </a:pPr>
             <a:r>
-              <a:rPr lang="en-US" sz="950" b="1" dirty="0">
+              <a:rPr lang="ar-SA" sz="950" b="1" dirty="0">
                 <a:solidFill>
                   <a:srgbClr val="FFFFFF"/>
                 </a:solidFill>
                 <a:latin typeface="Calibri" pitchFamily="34" charset="0"/>
+                <a:ea typeface="Amiri" pitchFamily="2" charset="-78"/>
                 <a:cs typeface="Amiri" pitchFamily="2" charset="-78"/>
               </a:rPr>
               <a:t>يُؤَدِّي إِلَى</a:t>
@@ -8730,11 +8790,12 @@
               <a:buNone/>
             </a:pPr>
             <a:r>
-              <a:rPr lang="en-US" sz="950" b="1" dirty="0">
+              <a:rPr lang="ar-SA" sz="950" b="1" dirty="0">
                 <a:solidFill>
                   <a:srgbClr val="FFFFFF"/>
                 </a:solidFill>
                 <a:latin typeface="Calibri" pitchFamily="34" charset="0"/>
+                <a:ea typeface="Amiri" pitchFamily="2" charset="-78"/>
                 <a:cs typeface="Amiri" pitchFamily="2" charset="-78"/>
               </a:rPr>
               <a:t>كَانَ المَاءُ وَسِخًا</a:t>
@@ -8868,6 +8929,7 @@
                   <a:srgbClr val="D4AF37"/>
                 </a:solidFill>
                 <a:latin typeface="Amiri" pitchFamily="2" charset="-78"/>
+                <a:ea typeface="Amiri" pitchFamily="2" charset="-78"/>
                 <a:cs typeface="Amiri" pitchFamily="2" charset="-78"/>
               </a:rPr>
               <a:t>م</a:t>
@@ -9125,6 +9187,7 @@
                   <a:srgbClr val="8A6D1E"/>
                 </a:solidFill>
                 <a:latin typeface="Amiri" pitchFamily="2" charset="-78"/>
+                <a:ea typeface="Amiri" pitchFamily="2" charset="-78"/>
                 <a:cs typeface="Amiri" pitchFamily="2" charset="-78"/>
               </a:rPr>
               <a:t>أ</a:t>
@@ -9189,6 +9252,7 @@
                   <a:srgbClr val="1B3B6F"/>
                 </a:solidFill>
                 <a:latin typeface="Amiri" pitchFamily="2" charset="-78"/>
+                <a:ea typeface="Amiri" pitchFamily="2" charset="-78"/>
                 <a:cs typeface="Amiri" pitchFamily="2" charset="-78"/>
               </a:rPr>
               <a:t>أ</a:t>
@@ -9240,6 +9304,7 @@
                   <a:srgbClr val="8A6D1E"/>
                 </a:solidFill>
                 <a:latin typeface="Amiri" pitchFamily="2" charset="-78"/>
+                <a:ea typeface="Amiri" pitchFamily="2" charset="-78"/>
                 <a:cs typeface="Amiri" pitchFamily="2" charset="-78"/>
               </a:rPr>
               <a:t>نَمُوذَجُ الإِجَابَةِ</a:t>
@@ -9353,6 +9418,7 @@
                   <a:srgbClr val="1F2A37"/>
                 </a:solidFill>
                 <a:latin typeface="Amiri" pitchFamily="2" charset="-78"/>
+                <a:ea typeface="Amiri" pitchFamily="2" charset="-78"/>
                 <a:cs typeface="Amiri" pitchFamily="2" charset="-78"/>
               </a:rPr>
               <a:t>يَظُنُّ كَثِيرٌ مِنَ النَّاسِ أَنَّ المَشَاكِلَ البِيئِيَّةَ بَعِيدَةٌ عَنْهُمْ، وَأَنَّهَا تَحْدُثُ فِي الغَابَاتِ الاسْتِوَائِيَّةِ أَوْ فِي القُطْبِ الشَّمَالِيِّ فَقَطْ. لٰكِنَّ الحَقِيقَةَ أَنَّ مَدِينَتِي نَفْسَهَا تُعَانِي مِنْ مَشَاكِلَ لَا تَقِلُّ خُطُورَةً.</a:t>
@@ -9372,6 +9438,7 @@
                   <a:srgbClr val="1F2A37"/>
                 </a:solidFill>
                 <a:latin typeface="Amiri" pitchFamily="2" charset="-78"/>
+                <a:ea typeface="Amiri" pitchFamily="2" charset="-78"/>
                 <a:cs typeface="Amiri" pitchFamily="2" charset="-78"/>
               </a:rPr>
               <a:t>أَوَّلُ هٰذِهِ المَشَاكِلِ تَلَوُّثُ الهَوَاءِ؛ فَبِسَبَبِ زَحْمَةِ المُرُورِ فِي سَاعَاتِ الصَّبَاحِ، تَمْتَلِئُ الشَّوَارِعُ بِدُخَانِ السَّيَّارَاتِ، مِمَّا يُسَبِّبُ الرَّبْوَ لِلْأَطْفَالِ وَكِبَارِ السِّنِّ. أَمَّا المُشْكِلَةُ الثَّانِيَةُ فَهِيَ النُّفَايَاتُ الَّتِي تُرْمَى فِي الحَدَائِقِ وَالقَنَوَاتِ، فَتُشَوِّهُ جَمَالَهَا وَتَقْتُلُ الحَيَوَانَاتِ.</a:t>
@@ -9391,6 +9458,7 @@
                   <a:srgbClr val="1F2A37"/>
                 </a:solidFill>
                 <a:latin typeface="Amiri" pitchFamily="2" charset="-78"/>
+                <a:ea typeface="Amiri" pitchFamily="2" charset="-78"/>
                 <a:cs typeface="Amiri" pitchFamily="2" charset="-78"/>
               </a:rPr>
               <a:t>وَقَدْ رَأَيْتُ نَتَائِجَ ذٰلِكَ بِنَفْسِي فِي الصَّيْفِ المَاضِي، عِنْدَمَا شَارَكْتُ فِي حَمْلَةِ تَنْظِيفٍ عَلَى ضِفَّةِ القَنَاةِ؛ فَقَدْ جَمَعْنَا خِلَالَ سَاعَتَيْنِ أَكْثَرَ مِنْ خَمْسِينَ كِيسًا مِنَ العُلَبِ وَالأَكْيَاسِ، وَوَجَدْنَا بَطَّةً عَالِقَةً فِي شَبَكَةٍ بْلَاسْتِيكِيَّةٍ.</a:t>
@@ -9410,6 +9478,7 @@
                   <a:srgbClr val="1F2A37"/>
                 </a:solidFill>
                 <a:latin typeface="Amiri" pitchFamily="2" charset="-78"/>
+                <a:ea typeface="Amiri" pitchFamily="2" charset="-78"/>
                 <a:cs typeface="Amiri" pitchFamily="2" charset="-78"/>
               </a:rPr>
               <a:t>صَحِيحٌ أَنَّ البَلَدِيَّةَ مَسْؤُولَةٌ عَنْ نَظَافَةِ المَدِينَةِ، غَيْرَ أَنَّ كُلَّ مُشْكِلَةٍ تَبْدَأُ بِتَصَرُّفٍ فَرْدِيٍّ صَغِيرٍ. وَلَوْ فَكَّرَ كُلُّ وَاحِدٍ مِنَّا قَبْلَ أَنْ يَرْمِيَ كِيسًا أَوْ يَرْكَبَ سَيَّارَتَهُ، لَتَغَيَّرَتْ مَدِينَتُنَا خِلَالَ سَنَوَاتٍ قَلِيلَةٍ.</a:t>
@@ -9508,11 +9577,12 @@
               <a:buNone/>
             </a:pPr>
             <a:r>
-              <a:rPr lang="en-US" sz="950" b="1" dirty="0">
+              <a:rPr lang="ar-SA" sz="950" b="1" dirty="0">
                 <a:solidFill>
                   <a:srgbClr val="FFFFFF"/>
                 </a:solidFill>
                 <a:latin typeface="Calibri" pitchFamily="34" charset="0"/>
+                <a:ea typeface="Amiri" pitchFamily="2" charset="-78"/>
                 <a:cs typeface="Amiri" pitchFamily="2" charset="-78"/>
               </a:rPr>
               <a:t>يَظُنُّ … أَنَّ</a:t>
@@ -9573,11 +9643,12 @@
               <a:buNone/>
             </a:pPr>
             <a:r>
-              <a:rPr lang="en-US" sz="950" b="1" dirty="0">
+              <a:rPr lang="ar-SA" sz="950" b="1" dirty="0">
                 <a:solidFill>
                   <a:srgbClr val="FFFFFF"/>
                 </a:solidFill>
                 <a:latin typeface="Calibri" pitchFamily="34" charset="0"/>
+                <a:ea typeface="Amiri" pitchFamily="2" charset="-78"/>
                 <a:cs typeface="Amiri" pitchFamily="2" charset="-78"/>
               </a:rPr>
               <a:t>فَبِسَبَبِ زَحْمَةِ</a:t>
@@ -9638,11 +9709,12 @@
               <a:buNone/>
             </a:pPr>
             <a:r>
-              <a:rPr lang="en-US" sz="950" b="1" dirty="0">
+              <a:rPr lang="ar-SA" sz="950" b="1" dirty="0">
                 <a:solidFill>
                   <a:srgbClr val="FFFFFF"/>
                 </a:solidFill>
                 <a:latin typeface="Calibri" pitchFamily="34" charset="0"/>
+                <a:ea typeface="Amiri" pitchFamily="2" charset="-78"/>
                 <a:cs typeface="Amiri" pitchFamily="2" charset="-78"/>
               </a:rPr>
               <a:t>مِمَّا يُسَبِّبُ</a:t>
@@ -9703,11 +9775,12 @@
               <a:buNone/>
             </a:pPr>
             <a:r>
-              <a:rPr lang="en-US" sz="950" b="1" dirty="0">
+              <a:rPr lang="ar-SA" sz="950" b="1" dirty="0">
                 <a:solidFill>
                   <a:srgbClr val="FFFFFF"/>
                 </a:solidFill>
                 <a:latin typeface="Calibri" pitchFamily="34" charset="0"/>
+                <a:ea typeface="Amiri" pitchFamily="2" charset="-78"/>
                 <a:cs typeface="Amiri" pitchFamily="2" charset="-78"/>
               </a:rPr>
               <a:t>لَوْ فَكَّرَ … لَتَغَيَّرَتْ</a:t>
@@ -9841,6 +9914,7 @@
                   <a:srgbClr val="D4AF37"/>
                 </a:solidFill>
                 <a:latin typeface="Amiri" pitchFamily="2" charset="-78"/>
+                <a:ea typeface="Amiri" pitchFamily="2" charset="-78"/>
                 <a:cs typeface="Amiri" pitchFamily="2" charset="-78"/>
               </a:rPr>
               <a:t>م</a:t>
@@ -10098,6 +10172,7 @@
                   <a:srgbClr val="8A6D1E"/>
                 </a:solidFill>
                 <a:latin typeface="Amiri" pitchFamily="2" charset="-78"/>
+                <a:ea typeface="Amiri" pitchFamily="2" charset="-78"/>
                 <a:cs typeface="Amiri" pitchFamily="2" charset="-78"/>
               </a:rPr>
               <a:t>ب</a:t>
@@ -10162,6 +10237,7 @@
                   <a:srgbClr val="1B3B6F"/>
                 </a:solidFill>
                 <a:latin typeface="Amiri" pitchFamily="2" charset="-78"/>
+                <a:ea typeface="Amiri" pitchFamily="2" charset="-78"/>
                 <a:cs typeface="Amiri" pitchFamily="2" charset="-78"/>
               </a:rPr>
               <a:t>ب</a:t>
@@ -10213,6 +10289,7 @@
                   <a:srgbClr val="8A6D1E"/>
                 </a:solidFill>
                 <a:latin typeface="Amiri" pitchFamily="2" charset="-78"/>
+                <a:ea typeface="Amiri" pitchFamily="2" charset="-78"/>
                 <a:cs typeface="Amiri" pitchFamily="2" charset="-78"/>
               </a:rPr>
               <a:t>نَمُوذَجُ الإِجَابَةِ</a:t>
@@ -10326,6 +10403,7 @@
                   <a:srgbClr val="1F2A37"/>
                 </a:solidFill>
                 <a:latin typeface="Amiri" pitchFamily="2" charset="-78"/>
+                <a:ea typeface="Amiri" pitchFamily="2" charset="-78"/>
                 <a:cs typeface="Amiri" pitchFamily="2" charset="-78"/>
               </a:rPr>
               <a:t>يُنْتِجُ العَالَمُ كُلَّ سَنَةٍ مِئَاتِ المَلَايِينِ مِنَ الأَطْنَانِ مِنَ البْلَاسْتِيكِ، وَيَنْتَهِي جُزْءٌ كَبِيرٌ مِنْهَا فِي البِحَارِ وَالمُحِيطَاتِ. وَيُقَدِّرُ العُلَمَاءُ أَنَّ كَمِّيَّةَ البْلَاسْتِيكِ فِي البَحْرِ قَدْ تَزِيدُ عَلَى كَمِّيَّةِ الأَسْمَاكِ قَبْلَ نِهَايَةِ هٰذَا القَرْنِ.</a:t>
@@ -10345,6 +10423,7 @@
                   <a:srgbClr val="1F2A37"/>
                 </a:solidFill>
                 <a:latin typeface="Amiri" pitchFamily="2" charset="-78"/>
+                <a:ea typeface="Amiri" pitchFamily="2" charset="-78"/>
                 <a:cs typeface="Amiri" pitchFamily="2" charset="-78"/>
               </a:rPr>
               <a:t>فِي المَاضِي كَانَ النَّاسُ يَحْمِلُونَ مُشْتَرَيَاتِهِمْ فِي سِلَالٍ، وَيَشْرَبُونَ مِنْ أَوَانٍ زُجَاجِيَّةٍ تُسْتَخْدَمُ سَنَوَاتٍ، أَمَّا اليَوْمَ فَكُلُّ شَيْءٍ تَقْرِيبًا يُغَلَّفُ بِالبْلَاسْتِيكِ ثُمَّ يُرْمَى بَعْدَ دَقَائِقَ، مِمَّا يُؤَدِّي إِلَى تَرَاكُمِ النُّفَايَاتِ فِي كُلِّ مَكَانٍ، مِنَ الشَّوَارِعِ إِلَى أَعْمَاقِ المُحِيطَاتِ.</a:t>
@@ -10364,6 +10443,7 @@
                   <a:srgbClr val="1F2A37"/>
                 </a:solidFill>
                 <a:latin typeface="Amiri" pitchFamily="2" charset="-78"/>
+                <a:ea typeface="Amiri" pitchFamily="2" charset="-78"/>
                 <a:cs typeface="Amiri" pitchFamily="2" charset="-78"/>
               </a:rPr>
               <a:t>وَقَدْ صُدِمْتُ فِي عُطْلَتِي الأَخِيرَةِ عَلَى سَاحِلِ البَحْرِ الأَحْمَرِ؛ فَبَيْنَمَا كُنْتُ أَغُوصُ لِأُشَاهِدَ الشِّعَابَ المَرْجَانِيَّةَ، رَأَيْتُ سُلَحْفَاةً تُحَاوِلُ أَنْ تَأْكُلَ كِيسًا شَفَّافًا تَظُنُّهُ قِنْدِيلَ بَحْرٍ، فَسَحَبَهُ المُدَرِّبُ مِنْ فَمِهَا بِسُرْعَةٍ، وَلَمْ أَنْسَ ذٰلِكَ المَشْهَدَ أَبَدًا.</a:t>
@@ -10383,6 +10463,7 @@
                   <a:srgbClr val="1F2A37"/>
                 </a:solidFill>
                 <a:latin typeface="Amiri" pitchFamily="2" charset="-78"/>
+                <a:ea typeface="Amiri" pitchFamily="2" charset="-78"/>
                 <a:cs typeface="Amiri" pitchFamily="2" charset="-78"/>
               </a:rPr>
               <a:t>صَحِيحٌ أَنَّ البْلَاسْتِيكَ رَخِيصٌ وَعَمَلِيٌّ، غَيْرَ أَنَّ ثَمَنَهُ الحَقِيقِيَّ تَدْفَعُهُ الطَّبِيعَةُ. وَإِذَا لَمْ تُفْرَضْ قَوَانِينُ صَارِمَةٌ عَلَى الشَّرِكَاتِ، وَلَمْ نُغَيِّرْ نَحْنُ عَادَاتِنَا، فَسَنَتْرُكُ لِأَبْنَائِنَا بِحَارًا بِلَا حَيَاةٍ.</a:t>
@@ -10481,11 +10562,12 @@
               <a:buNone/>
             </a:pPr>
             <a:r>
-              <a:rPr lang="en-US" sz="950" b="1" dirty="0">
+              <a:rPr lang="ar-SA" sz="950" b="1" dirty="0">
                 <a:solidFill>
                   <a:srgbClr val="FFFFFF"/>
                 </a:solidFill>
                 <a:latin typeface="Calibri" pitchFamily="34" charset="0"/>
+                <a:ea typeface="Amiri" pitchFamily="2" charset="-78"/>
                 <a:cs typeface="Amiri" pitchFamily="2" charset="-78"/>
               </a:rPr>
               <a:t>يُقَدِّرُ العُلَمَاءُ أَنَّ</a:t>
@@ -10546,11 +10628,12 @@
               <a:buNone/>
             </a:pPr>
             <a:r>
-              <a:rPr lang="en-US" sz="950" b="1" dirty="0">
+              <a:rPr lang="ar-SA" sz="950" b="1" dirty="0">
                 <a:solidFill>
                   <a:srgbClr val="FFFFFF"/>
                 </a:solidFill>
                 <a:latin typeface="Calibri" pitchFamily="34" charset="0"/>
+                <a:ea typeface="Amiri" pitchFamily="2" charset="-78"/>
                 <a:cs typeface="Amiri" pitchFamily="2" charset="-78"/>
               </a:rPr>
               <a:t>أَمَّا اليَوْمَ فَكُلُّ شَيْءٍ</a:t>
@@ -10611,11 +10694,12 @@
               <a:buNone/>
             </a:pPr>
             <a:r>
-              <a:rPr lang="en-US" sz="950" b="1" dirty="0">
+              <a:rPr lang="ar-SA" sz="950" b="1" dirty="0">
                 <a:solidFill>
                   <a:srgbClr val="FFFFFF"/>
                 </a:solidFill>
                 <a:latin typeface="Calibri" pitchFamily="34" charset="0"/>
+                <a:ea typeface="Amiri" pitchFamily="2" charset="-78"/>
                 <a:cs typeface="Amiri" pitchFamily="2" charset="-78"/>
               </a:rPr>
               <a:t>بَيْنَمَا كُنْتُ أَغُوصُ</a:t>
@@ -10676,11 +10760,12 @@
               <a:buNone/>
             </a:pPr>
             <a:r>
-              <a:rPr lang="en-US" sz="950" b="1" dirty="0">
+              <a:rPr lang="ar-SA" sz="950" b="1" dirty="0">
                 <a:solidFill>
                   <a:srgbClr val="FFFFFF"/>
                 </a:solidFill>
                 <a:latin typeface="Calibri" pitchFamily="34" charset="0"/>
+                <a:ea typeface="Amiri" pitchFamily="2" charset="-78"/>
                 <a:cs typeface="Amiri" pitchFamily="2" charset="-78"/>
               </a:rPr>
               <a:t>إِذَا لَمْ تُفْرَضْ … فَسَنَتْرُكُ</a:t>
@@ -10814,6 +10899,7 @@
                   <a:srgbClr val="D4AF37"/>
                 </a:solidFill>
                 <a:latin typeface="Amiri" pitchFamily="2" charset="-78"/>
+                <a:ea typeface="Amiri" pitchFamily="2" charset="-78"/>
                 <a:cs typeface="Amiri" pitchFamily="2" charset="-78"/>
               </a:rPr>
               <a:t>م</a:t>
@@ -11134,6 +11220,7 @@
                   <a:srgbClr val="8A6D1E"/>
                 </a:solidFill>
                 <a:latin typeface="Amiri" pitchFamily="2" charset="-78"/>
+                <a:ea typeface="Amiri" pitchFamily="2" charset="-78"/>
                 <a:cs typeface="Amiri" pitchFamily="2" charset="-78"/>
               </a:rPr>
               <a:t>قَيِّمْ عَمَلَكَ</a:t>
@@ -12378,6 +12465,7 @@
                   <a:srgbClr val="FFFFFF"/>
                 </a:solidFill>
                 <a:latin typeface="Amiri" pitchFamily="2" charset="-78"/>
+                <a:ea typeface="Amiri" pitchFamily="2" charset="-78"/>
                 <a:cs typeface="Amiri" pitchFamily="2" charset="-78"/>
               </a:rPr>
               <a:t>أَحْسَنْتُمْ! إِلَى اللِّقَاءِ</a:t>
@@ -12530,6 +12618,7 @@
                   <a:srgbClr val="D4AF37"/>
                 </a:solidFill>
                 <a:latin typeface="Amiri" pitchFamily="2" charset="-78"/>
+                <a:ea typeface="Amiri" pitchFamily="2" charset="-78"/>
                 <a:cs typeface="Amiri" pitchFamily="2" charset="-78"/>
               </a:rPr>
               <a:t>وَرْشَةُ التَّدْرِيبِ</a:t>
@@ -12663,6 +12752,7 @@
                   <a:srgbClr val="D4AF37"/>
                 </a:solidFill>
                 <a:latin typeface="Amiri" pitchFamily="2" charset="-78"/>
+                <a:ea typeface="Amiri" pitchFamily="2" charset="-78"/>
                 <a:cs typeface="Amiri" pitchFamily="2" charset="-78"/>
               </a:rPr>
               <a:t>م</a:t>
@@ -12983,6 +13073,7 @@
                   <a:srgbClr val="8A6D1E"/>
                 </a:solidFill>
                 <a:latin typeface="Amiri" pitchFamily="2" charset="-78"/>
+                <a:ea typeface="Amiri" pitchFamily="2" charset="-78"/>
                 <a:cs typeface="Amiri" pitchFamily="2" charset="-78"/>
               </a:rPr>
               <a:t>آدَابُ الصَّفِّ</a:t>
@@ -14514,6 +14605,7 @@
                   <a:srgbClr val="D4AF37"/>
                 </a:solidFill>
                 <a:latin typeface="Amiri" pitchFamily="2" charset="-78"/>
+                <a:ea typeface="Amiri" pitchFamily="2" charset="-78"/>
                 <a:cs typeface="Amiri" pitchFamily="2" charset="-78"/>
               </a:rPr>
               <a:t>م</a:t>
@@ -14834,6 +14926,7 @@
                   <a:srgbClr val="8A6D1E"/>
                 </a:solidFill>
                 <a:latin typeface="Amiri" pitchFamily="2" charset="-78"/>
+                <a:ea typeface="Amiri" pitchFamily="2" charset="-78"/>
                 <a:cs typeface="Amiri" pitchFamily="2" charset="-78"/>
               </a:rPr>
               <a:t>خَرِيطَةُ الوَرْشَةِ</a:t>
@@ -15148,6 +15241,7 @@
                   <a:srgbClr val="1B3B6F"/>
                 </a:solidFill>
                 <a:latin typeface="Amiri" pitchFamily="2" charset="-78"/>
+                <a:ea typeface="Amiri" pitchFamily="2" charset="-78"/>
                 <a:cs typeface="Amiri" pitchFamily="2" charset="-78"/>
               </a:rPr>
               <a:t>كَيْفَ</a:t>
@@ -15424,6 +15518,7 @@
                   <a:srgbClr val="1E6B52"/>
                 </a:solidFill>
                 <a:latin typeface="Amiri" pitchFamily="2" charset="-78"/>
+                <a:ea typeface="Amiri" pitchFamily="2" charset="-78"/>
                 <a:cs typeface="Amiri" pitchFamily="2" charset="-78"/>
               </a:rPr>
               <a:t>الاسْتِمَارَةُ</a:t>
@@ -15700,6 +15795,7 @@
                   <a:srgbClr val="1E6B52"/>
                 </a:solidFill>
                 <a:latin typeface="Amiri" pitchFamily="2" charset="-78"/>
+                <a:ea typeface="Amiri" pitchFamily="2" charset="-78"/>
                 <a:cs typeface="Amiri" pitchFamily="2" charset="-78"/>
               </a:rPr>
               <a:t>الرِّسَالَةُ</a:t>
@@ -15976,6 +16072,7 @@
                   <a:srgbClr val="1E6B52"/>
                 </a:solidFill>
                 <a:latin typeface="Amiri" pitchFamily="2" charset="-78"/>
+                <a:ea typeface="Amiri" pitchFamily="2" charset="-78"/>
                 <a:cs typeface="Amiri" pitchFamily="2" charset="-78"/>
               </a:rPr>
               <a:t>المَقَالُ</a:t>
@@ -16252,6 +16349,7 @@
                   <a:srgbClr val="8A6D1E"/>
                 </a:solidFill>
                 <a:latin typeface="Amiri" pitchFamily="2" charset="-78"/>
+                <a:ea typeface="Amiri" pitchFamily="2" charset="-78"/>
                 <a:cs typeface="Amiri" pitchFamily="2" charset="-78"/>
               </a:rPr>
               <a:t>قَيِّمْ</a:t>
@@ -16495,6 +16593,7 @@
                   <a:srgbClr val="D4AF37"/>
                 </a:solidFill>
                 <a:latin typeface="Amiri" pitchFamily="2" charset="-78"/>
+                <a:ea typeface="Amiri" pitchFamily="2" charset="-78"/>
                 <a:cs typeface="Amiri" pitchFamily="2" charset="-78"/>
               </a:rPr>
               <a:t>م</a:t>
@@ -16815,6 +16914,7 @@
                   <a:srgbClr val="8A6D1E"/>
                 </a:solidFill>
                 <a:latin typeface="Amiri" pitchFamily="2" charset="-78"/>
+                <a:ea typeface="Amiri" pitchFamily="2" charset="-78"/>
                 <a:cs typeface="Amiri" pitchFamily="2" charset="-78"/>
               </a:rPr>
               <a:t>امْتِحَانُ الكِتَابَةِ</a:t>
@@ -17439,6 +17539,7 @@
                   <a:srgbClr val="1B3B6F"/>
                 </a:solidFill>
                 <a:latin typeface="Amiri" pitchFamily="2" charset="-78"/>
+                <a:ea typeface="Amiri" pitchFamily="2" charset="-78"/>
                 <a:cs typeface="Amiri" pitchFamily="2" charset="-78"/>
               </a:rPr>
               <a:t>بِسَبَبِ زَحْمَةِ المُرُورِ</a:t>
@@ -17538,6 +17639,7 @@
                   <a:srgbClr val="1B3B6F"/>
                 </a:solidFill>
                 <a:latin typeface="Amiri" pitchFamily="2" charset="-78"/>
+                <a:ea typeface="Amiri" pitchFamily="2" charset="-78"/>
                 <a:cs typeface="Amiri" pitchFamily="2" charset="-78"/>
               </a:rPr>
               <a:t>مِمَّا يُسَبِّبُ الرَّبْوَ لِلْأَطْفَالِ</a:t>
@@ -17637,6 +17739,7 @@
                   <a:srgbClr val="1B3B6F"/>
                 </a:solidFill>
                 <a:latin typeface="Amiri" pitchFamily="2" charset="-78"/>
+                <a:ea typeface="Amiri" pitchFamily="2" charset="-78"/>
                 <a:cs typeface="Amiri" pitchFamily="2" charset="-78"/>
               </a:rPr>
               <a:t>النُّفَايَاتُ الَّتِي تُرْمَى فِي الحَدَائِقِ</a:t>
@@ -17808,6 +17911,7 @@
                   <a:srgbClr val="D4AF37"/>
                 </a:solidFill>
                 <a:latin typeface="Amiri" pitchFamily="2" charset="-78"/>
+                <a:ea typeface="Amiri" pitchFamily="2" charset="-78"/>
                 <a:cs typeface="Amiri" pitchFamily="2" charset="-78"/>
               </a:rPr>
               <a:t>م</a:t>
@@ -18128,6 +18232,7 @@
                   <a:srgbClr val="8A6D1E"/>
                 </a:solidFill>
                 <a:latin typeface="Amiri" pitchFamily="2" charset="-78"/>
+                <a:ea typeface="Amiri" pitchFamily="2" charset="-78"/>
                 <a:cs typeface="Amiri" pitchFamily="2" charset="-78"/>
               </a:rPr>
               <a:t>اسْتِمَارَةُ الإِبْلَاغِ عَنْ مُشْكِلَةٍ بِيئِيَّةٍ</a:t>
@@ -18484,6 +18589,7 @@
                   <a:srgbClr val="1B3B6F"/>
                 </a:solidFill>
                 <a:latin typeface="Amiri" pitchFamily="2" charset="-78"/>
+                <a:ea typeface="Amiri" pitchFamily="2" charset="-78"/>
                 <a:cs typeface="Amiri" pitchFamily="2" charset="-78"/>
               </a:rPr>
               <a:t>الاسْمُ وَالصَّفُّ</a:t>
@@ -18728,6 +18834,7 @@
                   <a:srgbClr val="1B3B6F"/>
                 </a:solidFill>
                 <a:latin typeface="Amiri" pitchFamily="2" charset="-78"/>
+                <a:ea typeface="Amiri" pitchFamily="2" charset="-78"/>
                 <a:cs typeface="Amiri" pitchFamily="2" charset="-78"/>
               </a:rPr>
               <a:t>المَكَانُ</a:t>
@@ -18972,6 +19079,7 @@
                   <a:srgbClr val="1B3B6F"/>
                 </a:solidFill>
                 <a:latin typeface="Amiri" pitchFamily="2" charset="-78"/>
+                <a:ea typeface="Amiri" pitchFamily="2" charset="-78"/>
                 <a:cs typeface="Amiri" pitchFamily="2" charset="-78"/>
               </a:rPr>
               <a:t>نَوْعُ المُشْكِلَةِ</a:t>
@@ -19216,6 +19324,7 @@
                   <a:srgbClr val="1B3B6F"/>
                 </a:solidFill>
                 <a:latin typeface="Amiri" pitchFamily="2" charset="-78"/>
+                <a:ea typeface="Amiri" pitchFamily="2" charset="-78"/>
                 <a:cs typeface="Amiri" pitchFamily="2" charset="-78"/>
               </a:rPr>
               <a:t>التَّارِيخُ</a:t>
@@ -19460,6 +19569,7 @@
                   <a:srgbClr val="1B3B6F"/>
                 </a:solidFill>
                 <a:latin typeface="Amiri" pitchFamily="2" charset="-78"/>
+                <a:ea typeface="Amiri" pitchFamily="2" charset="-78"/>
                 <a:cs typeface="Amiri" pitchFamily="2" charset="-78"/>
               </a:rPr>
               <a:t>مَتَى تَحْدُثُ؟</a:t>
@@ -19704,6 +19814,7 @@
                   <a:srgbClr val="1B3B6F"/>
                 </a:solidFill>
                 <a:latin typeface="Amiri" pitchFamily="2" charset="-78"/>
+                <a:ea typeface="Amiri" pitchFamily="2" charset="-78"/>
                 <a:cs typeface="Amiri" pitchFamily="2" charset="-78"/>
               </a:rPr>
               <a:t>السَّبَبُ</a:t>
@@ -19948,6 +20059,7 @@
                   <a:srgbClr val="1B3B6F"/>
                 </a:solidFill>
                 <a:latin typeface="Amiri" pitchFamily="2" charset="-78"/>
+                <a:ea typeface="Amiri" pitchFamily="2" charset="-78"/>
                 <a:cs typeface="Amiri" pitchFamily="2" charset="-78"/>
               </a:rPr>
               <a:t>النَّتِيجَةُ</a:t>
@@ -20127,6 +20239,7 @@
                   <a:srgbClr val="1B3B6F"/>
                 </a:solidFill>
                 <a:latin typeface="Amiri" pitchFamily="2" charset="-78"/>
+                <a:ea typeface="Amiri" pitchFamily="2" charset="-78"/>
                 <a:cs typeface="Amiri" pitchFamily="2" charset="-78"/>
               </a:rPr>
               <a:t>جُمْلَةٌ: اقْتِرَاحُكَ</a:t>
@@ -20336,6 +20449,7 @@
                   <a:srgbClr val="D4AF37"/>
                 </a:solidFill>
                 <a:latin typeface="Amiri" pitchFamily="2" charset="-78"/>
+                <a:ea typeface="Amiri" pitchFamily="2" charset="-78"/>
                 <a:cs typeface="Amiri" pitchFamily="2" charset="-78"/>
               </a:rPr>
               <a:t>م</a:t>
@@ -20656,6 +20770,7 @@
                   <a:srgbClr val="8A6D1E"/>
                 </a:solidFill>
                 <a:latin typeface="Amiri" pitchFamily="2" charset="-78"/>
+                <a:ea typeface="Amiri" pitchFamily="2" charset="-78"/>
                 <a:cs typeface="Amiri" pitchFamily="2" charset="-78"/>
               </a:rPr>
               <a:t>نَمُوذَجُ الإِجَابَةِ</a:t>
@@ -20974,6 +21089,7 @@
                   <a:srgbClr val="1B3B6F"/>
                 </a:solidFill>
                 <a:latin typeface="Amiri" pitchFamily="2" charset="-78"/>
+                <a:ea typeface="Amiri" pitchFamily="2" charset="-78"/>
                 <a:cs typeface="Amiri" pitchFamily="2" charset="-78"/>
               </a:rPr>
               <a:t>مَرْيَمُ حَسَنٌ، الصَّفُّ العَاشِرُ</a:t>
@@ -21012,6 +21128,7 @@
                   <a:srgbClr val="1B3B6F"/>
                 </a:solidFill>
                 <a:latin typeface="Amiri" pitchFamily="2" charset="-78"/>
+                <a:ea typeface="Amiri" pitchFamily="2" charset="-78"/>
                 <a:cs typeface="Amiri" pitchFamily="2" charset="-78"/>
               </a:rPr>
               <a:t>الاسْمُ وَالصَّفُّ</a:t>
@@ -21153,6 +21270,7 @@
                   <a:srgbClr val="1B3B6F"/>
                 </a:solidFill>
                 <a:latin typeface="Amiri" pitchFamily="2" charset="-78"/>
+                <a:ea typeface="Amiri" pitchFamily="2" charset="-78"/>
                 <a:cs typeface="Amiri" pitchFamily="2" charset="-78"/>
               </a:rPr>
               <a:t>مَلْعَبُ المَدْرَسَةِ</a:t>
@@ -21191,6 +21309,7 @@
                   <a:srgbClr val="1B3B6F"/>
                 </a:solidFill>
                 <a:latin typeface="Amiri" pitchFamily="2" charset="-78"/>
+                <a:ea typeface="Amiri" pitchFamily="2" charset="-78"/>
                 <a:cs typeface="Amiri" pitchFamily="2" charset="-78"/>
               </a:rPr>
               <a:t>المَكَانُ</a:t>
@@ -21332,6 +21451,7 @@
                   <a:srgbClr val="1B3B6F"/>
                 </a:solidFill>
                 <a:latin typeface="Amiri" pitchFamily="2" charset="-78"/>
+                <a:ea typeface="Amiri" pitchFamily="2" charset="-78"/>
                 <a:cs typeface="Amiri" pitchFamily="2" charset="-78"/>
               </a:rPr>
               <a:t>نُفَايَاتٌ بْلَاسْتِيكِيَّةٌ</a:t>
@@ -21370,6 +21490,7 @@
                   <a:srgbClr val="1B3B6F"/>
                 </a:solidFill>
                 <a:latin typeface="Amiri" pitchFamily="2" charset="-78"/>
+                <a:ea typeface="Amiri" pitchFamily="2" charset="-78"/>
                 <a:cs typeface="Amiri" pitchFamily="2" charset="-78"/>
               </a:rPr>
               <a:t>نَوْعُ المُشْكِلَةِ</a:t>
@@ -21511,6 +21632,7 @@
                   <a:srgbClr val="1B3B6F"/>
                 </a:solidFill>
                 <a:latin typeface="Amiri" pitchFamily="2" charset="-78"/>
+                <a:ea typeface="Amiri" pitchFamily="2" charset="-78"/>
                 <a:cs typeface="Amiri" pitchFamily="2" charset="-78"/>
               </a:rPr>
               <a:t>يَوْمُ الاثْنَيْنِ، ١٢ مَارِس</a:t>
@@ -21549,6 +21671,7 @@
                   <a:srgbClr val="1B3B6F"/>
                 </a:solidFill>
                 <a:latin typeface="Amiri" pitchFamily="2" charset="-78"/>
+                <a:ea typeface="Amiri" pitchFamily="2" charset="-78"/>
                 <a:cs typeface="Amiri" pitchFamily="2" charset="-78"/>
               </a:rPr>
               <a:t>التَّارِيخُ</a:t>
@@ -21690,6 +21813,7 @@
                   <a:srgbClr val="1B3B6F"/>
                 </a:solidFill>
                 <a:latin typeface="Amiri" pitchFamily="2" charset="-78"/>
+                <a:ea typeface="Amiri" pitchFamily="2" charset="-78"/>
                 <a:cs typeface="Amiri" pitchFamily="2" charset="-78"/>
               </a:rPr>
               <a:t>بَعْدَ الاسْتِرَاحَةِ</a:t>
@@ -21728,6 +21852,7 @@
                   <a:srgbClr val="1B3B6F"/>
                 </a:solidFill>
                 <a:latin typeface="Amiri" pitchFamily="2" charset="-78"/>
+                <a:ea typeface="Amiri" pitchFamily="2" charset="-78"/>
                 <a:cs typeface="Amiri" pitchFamily="2" charset="-78"/>
               </a:rPr>
               <a:t>مَتَى تَحْدُثُ؟</a:t>
@@ -21869,6 +21994,7 @@
                   <a:srgbClr val="1B3B6F"/>
                 </a:solidFill>
                 <a:latin typeface="Amiri" pitchFamily="2" charset="-78"/>
+                <a:ea typeface="Amiri" pitchFamily="2" charset="-78"/>
                 <a:cs typeface="Amiri" pitchFamily="2" charset="-78"/>
               </a:rPr>
               <a:t>قِلَّةُ السَّلَّاتِ</a:t>
@@ -21907,6 +22033,7 @@
                   <a:srgbClr val="1B3B6F"/>
                 </a:solidFill>
                 <a:latin typeface="Amiri" pitchFamily="2" charset="-78"/>
+                <a:ea typeface="Amiri" pitchFamily="2" charset="-78"/>
                 <a:cs typeface="Amiri" pitchFamily="2" charset="-78"/>
               </a:rPr>
               <a:t>السَّبَبُ</a:t>
@@ -22048,6 +22175,7 @@
                   <a:srgbClr val="1B3B6F"/>
                 </a:solidFill>
                 <a:latin typeface="Amiri" pitchFamily="2" charset="-78"/>
+                <a:ea typeface="Amiri" pitchFamily="2" charset="-78"/>
                 <a:cs typeface="Amiri" pitchFamily="2" charset="-78"/>
               </a:rPr>
               <a:t>المَكَانُ وَسِخٌ وَالطُّيُورُ تَأْكُلُ البْلَاسْتِيكَ</a:t>
@@ -22086,6 +22214,7 @@
                   <a:srgbClr val="1B3B6F"/>
                 </a:solidFill>
                 <a:latin typeface="Amiri" pitchFamily="2" charset="-78"/>
+                <a:ea typeface="Amiri" pitchFamily="2" charset="-78"/>
                 <a:cs typeface="Amiri" pitchFamily="2" charset="-78"/>
               </a:rPr>
               <a:t>النَّتِيجَةُ</a:t>
@@ -22227,6 +22356,7 @@
                   <a:srgbClr val="1B3B6F"/>
                 </a:solidFill>
                 <a:latin typeface="Amiri" pitchFamily="2" charset="-78"/>
+                <a:ea typeface="Amiri" pitchFamily="2" charset="-78"/>
                 <a:cs typeface="Amiri" pitchFamily="2" charset="-78"/>
               </a:rPr>
               <a:t>أَقْتَرِحُ أَنْ تُوضَعَ سَلَّاتٌ لِلتَّدْوِيرِ بِجَانِبِ المَقْصَفِ.</a:t>
@@ -22265,6 +22395,7 @@
                   <a:srgbClr val="1B3B6F"/>
                 </a:solidFill>
                 <a:latin typeface="Amiri" pitchFamily="2" charset="-78"/>
+                <a:ea typeface="Amiri" pitchFamily="2" charset="-78"/>
                 <a:cs typeface="Amiri" pitchFamily="2" charset="-78"/>
               </a:rPr>
               <a:t>جُمْلَةٌ: اقْتِرَاحُكَ</a:t>
@@ -22474,6 +22605,7 @@
                   <a:srgbClr val="D4AF37"/>
                 </a:solidFill>
                 <a:latin typeface="Amiri" pitchFamily="2" charset="-78"/>
+                <a:ea typeface="Amiri" pitchFamily="2" charset="-78"/>
                 <a:cs typeface="Amiri" pitchFamily="2" charset="-78"/>
               </a:rPr>
               <a:t>م</a:t>
@@ -22794,6 +22926,7 @@
                   <a:srgbClr val="8A6D1E"/>
                 </a:solidFill>
                 <a:latin typeface="Amiri" pitchFamily="2" charset="-78"/>
+                <a:ea typeface="Amiri" pitchFamily="2" charset="-78"/>
                 <a:cs typeface="Amiri" pitchFamily="2" charset="-78"/>
               </a:rPr>
               <a:t>رِسَالَةٌ إِلَى المُدِيرِ</a:t>
@@ -23269,6 +23402,7 @@
                   <a:srgbClr val="1B3B6F"/>
                 </a:solidFill>
                 <a:latin typeface="Amiri" pitchFamily="2" charset="-78"/>
+                <a:ea typeface="Amiri" pitchFamily="2" charset="-78"/>
                 <a:cs typeface="Amiri" pitchFamily="2" charset="-78"/>
               </a:rPr>
               <a:t>أَكْتُبُ إِلَيْكَ عَنْ مُشْكِلَةٍ …</a:t>
@@ -23345,6 +23479,7 @@
                   <a:srgbClr val="1B3B6F"/>
                 </a:solidFill>
                 <a:latin typeface="Amiri" pitchFamily="2" charset="-78"/>
+                <a:ea typeface="Amiri" pitchFamily="2" charset="-78"/>
                 <a:cs typeface="Amiri" pitchFamily="2" charset="-78"/>
               </a:rPr>
               <a:t>السَّبَبُ أَنَّ …</a:t>
@@ -23421,6 +23556,7 @@
                   <a:srgbClr val="1B3B6F"/>
                 </a:solidFill>
                 <a:latin typeface="Amiri" pitchFamily="2" charset="-78"/>
+                <a:ea typeface="Amiri" pitchFamily="2" charset="-78"/>
                 <a:cs typeface="Amiri" pitchFamily="2" charset="-78"/>
               </a:rPr>
               <a:t>أَمْسِ رَأَيْتُ …</a:t>
@@ -23497,6 +23633,7 @@
                   <a:srgbClr val="1B3B6F"/>
                 </a:solidFill>
                 <a:latin typeface="Amiri" pitchFamily="2" charset="-78"/>
+                <a:ea typeface="Amiri" pitchFamily="2" charset="-78"/>
                 <a:cs typeface="Amiri" pitchFamily="2" charset="-78"/>
               </a:rPr>
               <a:t>أَقْتَرِحُ أَنْ … وَسَنُنَظِّمُ …</a:t>
@@ -23668,6 +23805,7 @@
                   <a:srgbClr val="D4AF37"/>
                 </a:solidFill>
                 <a:latin typeface="Amiri" pitchFamily="2" charset="-78"/>
+                <a:ea typeface="Amiri" pitchFamily="2" charset="-78"/>
                 <a:cs typeface="Amiri" pitchFamily="2" charset="-78"/>
               </a:rPr>
               <a:t>م</a:t>
@@ -23988,6 +24126,7 @@
                   <a:srgbClr val="8A6D1E"/>
                 </a:solidFill>
                 <a:latin typeface="Amiri" pitchFamily="2" charset="-78"/>
+                <a:ea typeface="Amiri" pitchFamily="2" charset="-78"/>
                 <a:cs typeface="Amiri" pitchFamily="2" charset="-78"/>
               </a:rPr>
               <a:t>نَصُّ السُّؤَالِ</a:t>
@@ -24268,6 +24407,7 @@
                   <a:srgbClr val="1B3B6F"/>
                 </a:solidFill>
                 <a:latin typeface="Amiri" pitchFamily="2" charset="-78"/>
+                <a:ea typeface="Amiri" pitchFamily="2" charset="-78"/>
                 <a:cs typeface="Amiri" pitchFamily="2" charset="-78"/>
               </a:rPr>
               <a:t>هُنَاكَ مُشْكِلَةٌ بِيئِيَّةٌ فِي مَدْرَسَتِكَ. اكْتُبْ رِسَالَةً إِلَى المُدِيرِ (٨٠–٩٠ كَلِمَةً).</a:t>
@@ -24409,6 +24549,7 @@
                   <a:srgbClr val="1B3B6F"/>
                 </a:solidFill>
                 <a:latin typeface="Amiri" pitchFamily="2" charset="-78"/>
+                <a:ea typeface="Amiri" pitchFamily="2" charset="-78"/>
                 <a:cs typeface="Amiri" pitchFamily="2" charset="-78"/>
               </a:rPr>
               <a:t>مَا المُشْكِلَةُ؟</a:t>
@@ -24550,6 +24691,7 @@
                   <a:srgbClr val="1B3B6F"/>
                 </a:solidFill>
                 <a:latin typeface="Amiri" pitchFamily="2" charset="-78"/>
+                <a:ea typeface="Amiri" pitchFamily="2" charset="-78"/>
                 <a:cs typeface="Amiri" pitchFamily="2" charset="-78"/>
               </a:rPr>
               <a:t>مَا أَسْبَابُهَا؟</a:t>
@@ -24691,6 +24833,7 @@
                   <a:srgbClr val="1B3B6F"/>
                 </a:solidFill>
                 <a:latin typeface="Amiri" pitchFamily="2" charset="-78"/>
+                <a:ea typeface="Amiri" pitchFamily="2" charset="-78"/>
                 <a:cs typeface="Amiri" pitchFamily="2" charset="-78"/>
               </a:rPr>
               <a:t>مَاذَا رَأَيْتَ مُؤَخَّرًا؟</a:t>
@@ -24832,6 +24975,7 @@
                   <a:srgbClr val="1B3B6F"/>
                 </a:solidFill>
                 <a:latin typeface="Amiri" pitchFamily="2" charset="-78"/>
+                <a:ea typeface="Amiri" pitchFamily="2" charset="-78"/>
                 <a:cs typeface="Amiri" pitchFamily="2" charset="-78"/>
               </a:rPr>
               <a:t>مَا اقْتِرَاحُكَ؟ وَمَاذَا سَيَفْعَلُ الطُّلَّابُ؟</a:t>
@@ -25041,6 +25185,7 @@
                   <a:srgbClr val="D4AF37"/>
                 </a:solidFill>
                 <a:latin typeface="Amiri" pitchFamily="2" charset="-78"/>
+                <a:ea typeface="Amiri" pitchFamily="2" charset="-78"/>
                 <a:cs typeface="Amiri" pitchFamily="2" charset="-78"/>
               </a:rPr>
               <a:t>م</a:t>
@@ -25361,6 +25506,7 @@
                   <a:srgbClr val="8A6D1E"/>
                 </a:solidFill>
                 <a:latin typeface="Amiri" pitchFamily="2" charset="-78"/>
+                <a:ea typeface="Amiri" pitchFamily="2" charset="-78"/>
                 <a:cs typeface="Amiri" pitchFamily="2" charset="-78"/>
               </a:rPr>
               <a:t>قَوَالِبُ الكِتَابَةِ</a:t>
@@ -25641,6 +25787,7 @@
                   <a:srgbClr val="1B3B6F"/>
                 </a:solidFill>
                 <a:latin typeface="Amiri" pitchFamily="2" charset="-78"/>
+                <a:ea typeface="Amiri" pitchFamily="2" charset="-78"/>
                 <a:cs typeface="Amiri" pitchFamily="2" charset="-78"/>
               </a:rPr>
               <a:t>إِلَى مُدِيرِ المَدْرَسَةِ المُحْتَرَمِ،</a:t>
@@ -25847,6 +25994,7 @@
                   <a:srgbClr val="1B3B6F"/>
                 </a:solidFill>
                 <a:latin typeface="Amiri" pitchFamily="2" charset="-78"/>
+                <a:ea typeface="Amiri" pitchFamily="2" charset="-78"/>
                 <a:cs typeface="Amiri" pitchFamily="2" charset="-78"/>
               </a:rPr>
               <a:t>أَكْتُبُ إِلَيْكَ عَنْ مُشْكِلَةِ ______ فِي مَدْرَسَتِنَا.</a:t>
@@ -26053,6 +26201,7 @@
                   <a:srgbClr val="1B3B6F"/>
                 </a:solidFill>
                 <a:latin typeface="Amiri" pitchFamily="2" charset="-78"/>
+                <a:ea typeface="Amiri" pitchFamily="2" charset="-78"/>
                 <a:cs typeface="Amiri" pitchFamily="2" charset="-78"/>
               </a:rPr>
               <a:t>السَّبَبُ أَنَّ ______ ، وَأَنَّ ______ .</a:t>
@@ -26259,6 +26408,7 @@
                   <a:srgbClr val="1B3B6F"/>
                 </a:solidFill>
                 <a:latin typeface="Amiri" pitchFamily="2" charset="-78"/>
+                <a:ea typeface="Amiri" pitchFamily="2" charset="-78"/>
                 <a:cs typeface="Amiri" pitchFamily="2" charset="-78"/>
               </a:rPr>
               <a:t>أَمْسِ رَأَيْتُ ______ .</a:t>
@@ -26465,6 +26615,7 @@
                   <a:srgbClr val="1B3B6F"/>
                 </a:solidFill>
                 <a:latin typeface="Amiri" pitchFamily="2" charset="-78"/>
+                <a:ea typeface="Amiri" pitchFamily="2" charset="-78"/>
                 <a:cs typeface="Amiri" pitchFamily="2" charset="-78"/>
               </a:rPr>
               <a:t>أَقْتَرِحُ أَنْ ______ ، وَسَنُنَظِّمُ نَحْنُ ______ .</a:t>
@@ -26671,6 +26822,7 @@
                   <a:srgbClr val="1B3B6F"/>
                 </a:solidFill>
                 <a:latin typeface="Amiri" pitchFamily="2" charset="-78"/>
+                <a:ea typeface="Amiri" pitchFamily="2" charset="-78"/>
                 <a:cs typeface="Amiri" pitchFamily="2" charset="-78"/>
               </a:rPr>
               <a:t>مَعَ الشُّكْرِ، ______</a:t>
@@ -26910,13 +27062,9 @@
     <a:fontScheme name="Office">
       <a:majorFont>
         <a:latin typeface="Calibri Light" panose="020F0302020204030204"/>
-        <a:ea typeface=""/>
-        <a:cs typeface=""/>
-        <a:font script="Jpan" typeface="游ゴシック Light"/>
-        <a:font script="Hang" typeface="맑은 고딕"/>
-        <a:font script="Hans" typeface="等线 Light"/>
-        <a:font script="Hant" typeface="新細明體"/>
-        <a:font script="Arab" typeface="Times New Roman"/>
+        <a:ea typeface="Amiri" pitchFamily="2" charset="-78"/>
+        <a:cs typeface="Amiri" pitchFamily="2" charset="-78"/>
+        <a:font script="Arab" typeface="Amiri"/>
         <a:font script="Hebr" typeface="Times New Roman"/>
         <a:font script="Thai" typeface="Angsana New"/>
         <a:font script="Ethi" typeface="Nyala"/>
@@ -26962,13 +27110,9 @@
       </a:majorFont>
       <a:minorFont>
         <a:latin typeface="Calibri" panose="020F0502020204030204"/>
-        <a:ea typeface=""/>
-        <a:cs typeface=""/>
-        <a:font script="Jpan" typeface="游ゴシック"/>
-        <a:font script="Hang" typeface="맑은 고딕"/>
-        <a:font script="Hans" typeface="等线"/>
-        <a:font script="Hant" typeface="新細明體"/>
-        <a:font script="Arab" typeface="Arial"/>
+        <a:ea typeface="Amiri" pitchFamily="2" charset="-78"/>
+        <a:cs typeface="Amiri" pitchFamily="2" charset="-78"/>
+        <a:font script="Arab" typeface="Amiri"/>
         <a:font script="Hebr" typeface="Arial"/>
         <a:font script="Thai" typeface="Cordia New"/>
         <a:font script="Ethi" typeface="Nyala"/>

--- a/Topic_C/Exam_Practice/TC-L04_Writing_Workshop_Environmental_Problems_Causes.pptx
+++ b/Topic_C/Exam_Practice/TC-L04_Writing_Workshop_Environmental_Problems_Causes.pptx
@@ -3848,7 +3848,7 @@
                 <a:solidFill>
                   <a:srgbClr val="FFFFFF"/>
                 </a:solidFill>
-                <a:latin typeface="Calibri" pitchFamily="34" charset="0"/>
+                <a:latin typeface="Amiri" pitchFamily="2" charset="-78"/>
                 <a:ea typeface="Amiri" pitchFamily="2" charset="-78"/>
                 <a:cs typeface="Amiri" pitchFamily="2" charset="-78"/>
               </a:rPr>
@@ -3914,7 +3914,7 @@
                 <a:solidFill>
                   <a:srgbClr val="FFFFFF"/>
                 </a:solidFill>
-                <a:latin typeface="Calibri" pitchFamily="34" charset="0"/>
+                <a:latin typeface="Amiri" pitchFamily="2" charset="-78"/>
                 <a:ea typeface="Amiri" pitchFamily="2" charset="-78"/>
                 <a:cs typeface="Amiri" pitchFamily="2" charset="-78"/>
               </a:rPr>
@@ -3980,7 +3980,7 @@
                 <a:solidFill>
                   <a:srgbClr val="FFFFFF"/>
                 </a:solidFill>
-                <a:latin typeface="Calibri" pitchFamily="34" charset="0"/>
+                <a:latin typeface="Amiri" pitchFamily="2" charset="-78"/>
                 <a:ea typeface="Amiri" pitchFamily="2" charset="-78"/>
                 <a:cs typeface="Amiri" pitchFamily="2" charset="-78"/>
               </a:rPr>
@@ -4046,7 +4046,7 @@
                 <a:solidFill>
                   <a:srgbClr val="FFFFFF"/>
                 </a:solidFill>
-                <a:latin typeface="Calibri" pitchFamily="34" charset="0"/>
+                <a:latin typeface="Amiri" pitchFamily="2" charset="-78"/>
                 <a:ea typeface="Amiri" pitchFamily="2" charset="-78"/>
                 <a:cs typeface="Amiri" pitchFamily="2" charset="-78"/>
               </a:rPr>
@@ -4844,7 +4844,7 @@
                 <a:solidFill>
                   <a:srgbClr val="FFFFFF"/>
                 </a:solidFill>
-                <a:latin typeface="Calibri" pitchFamily="34" charset="0"/>
+                <a:latin typeface="Amiri" pitchFamily="2" charset="-78"/>
                 <a:ea typeface="Amiri" pitchFamily="2" charset="-78"/>
                 <a:cs typeface="Amiri" pitchFamily="2" charset="-78"/>
               </a:rPr>
@@ -4910,7 +4910,7 @@
                 <a:solidFill>
                   <a:srgbClr val="FFFFFF"/>
                 </a:solidFill>
-                <a:latin typeface="Calibri" pitchFamily="34" charset="0"/>
+                <a:latin typeface="Amiri" pitchFamily="2" charset="-78"/>
                 <a:ea typeface="Amiri" pitchFamily="2" charset="-78"/>
                 <a:cs typeface="Amiri" pitchFamily="2" charset="-78"/>
               </a:rPr>
@@ -4976,7 +4976,7 @@
                 <a:solidFill>
                   <a:srgbClr val="FFFFFF"/>
                 </a:solidFill>
-                <a:latin typeface="Calibri" pitchFamily="34" charset="0"/>
+                <a:latin typeface="Amiri" pitchFamily="2" charset="-78"/>
                 <a:ea typeface="Amiri" pitchFamily="2" charset="-78"/>
                 <a:cs typeface="Amiri" pitchFamily="2" charset="-78"/>
               </a:rPr>
@@ -5042,7 +5042,7 @@
                 <a:solidFill>
                   <a:srgbClr val="FFFFFF"/>
                 </a:solidFill>
-                <a:latin typeface="Calibri" pitchFamily="34" charset="0"/>
+                <a:latin typeface="Amiri" pitchFamily="2" charset="-78"/>
                 <a:ea typeface="Amiri" pitchFamily="2" charset="-78"/>
                 <a:cs typeface="Amiri" pitchFamily="2" charset="-78"/>
               </a:rPr>
@@ -8596,7 +8596,7 @@
                 <a:solidFill>
                   <a:srgbClr val="FFFFFF"/>
                 </a:solidFill>
-                <a:latin typeface="Calibri" pitchFamily="34" charset="0"/>
+                <a:latin typeface="Amiri" pitchFamily="2" charset="-78"/>
                 <a:ea typeface="Amiri" pitchFamily="2" charset="-78"/>
                 <a:cs typeface="Amiri" pitchFamily="2" charset="-78"/>
               </a:rPr>
@@ -8662,7 +8662,7 @@
                 <a:solidFill>
                   <a:srgbClr val="FFFFFF"/>
                 </a:solidFill>
-                <a:latin typeface="Calibri" pitchFamily="34" charset="0"/>
+                <a:latin typeface="Amiri" pitchFamily="2" charset="-78"/>
                 <a:ea typeface="Amiri" pitchFamily="2" charset="-78"/>
                 <a:cs typeface="Amiri" pitchFamily="2" charset="-78"/>
               </a:rPr>
@@ -8728,7 +8728,7 @@
                 <a:solidFill>
                   <a:srgbClr val="FFFFFF"/>
                 </a:solidFill>
-                <a:latin typeface="Calibri" pitchFamily="34" charset="0"/>
+                <a:latin typeface="Amiri" pitchFamily="2" charset="-78"/>
                 <a:ea typeface="Amiri" pitchFamily="2" charset="-78"/>
                 <a:cs typeface="Amiri" pitchFamily="2" charset="-78"/>
               </a:rPr>
@@ -8794,7 +8794,7 @@
                 <a:solidFill>
                   <a:srgbClr val="FFFFFF"/>
                 </a:solidFill>
-                <a:latin typeface="Calibri" pitchFamily="34" charset="0"/>
+                <a:latin typeface="Amiri" pitchFamily="2" charset="-78"/>
                 <a:ea typeface="Amiri" pitchFamily="2" charset="-78"/>
                 <a:cs typeface="Amiri" pitchFamily="2" charset="-78"/>
               </a:rPr>
@@ -9581,7 +9581,7 @@
                 <a:solidFill>
                   <a:srgbClr val="FFFFFF"/>
                 </a:solidFill>
-                <a:latin typeface="Calibri" pitchFamily="34" charset="0"/>
+                <a:latin typeface="Amiri" pitchFamily="2" charset="-78"/>
                 <a:ea typeface="Amiri" pitchFamily="2" charset="-78"/>
                 <a:cs typeface="Amiri" pitchFamily="2" charset="-78"/>
               </a:rPr>
@@ -9647,7 +9647,7 @@
                 <a:solidFill>
                   <a:srgbClr val="FFFFFF"/>
                 </a:solidFill>
-                <a:latin typeface="Calibri" pitchFamily="34" charset="0"/>
+                <a:latin typeface="Amiri" pitchFamily="2" charset="-78"/>
                 <a:ea typeface="Amiri" pitchFamily="2" charset="-78"/>
                 <a:cs typeface="Amiri" pitchFamily="2" charset="-78"/>
               </a:rPr>
@@ -9713,7 +9713,7 @@
                 <a:solidFill>
                   <a:srgbClr val="FFFFFF"/>
                 </a:solidFill>
-                <a:latin typeface="Calibri" pitchFamily="34" charset="0"/>
+                <a:latin typeface="Amiri" pitchFamily="2" charset="-78"/>
                 <a:ea typeface="Amiri" pitchFamily="2" charset="-78"/>
                 <a:cs typeface="Amiri" pitchFamily="2" charset="-78"/>
               </a:rPr>
@@ -9779,7 +9779,7 @@
                 <a:solidFill>
                   <a:srgbClr val="FFFFFF"/>
                 </a:solidFill>
-                <a:latin typeface="Calibri" pitchFamily="34" charset="0"/>
+                <a:latin typeface="Amiri" pitchFamily="2" charset="-78"/>
                 <a:ea typeface="Amiri" pitchFamily="2" charset="-78"/>
                 <a:cs typeface="Amiri" pitchFamily="2" charset="-78"/>
               </a:rPr>
@@ -10566,7 +10566,7 @@
                 <a:solidFill>
                   <a:srgbClr val="FFFFFF"/>
                 </a:solidFill>
-                <a:latin typeface="Calibri" pitchFamily="34" charset="0"/>
+                <a:latin typeface="Amiri" pitchFamily="2" charset="-78"/>
                 <a:ea typeface="Amiri" pitchFamily="2" charset="-78"/>
                 <a:cs typeface="Amiri" pitchFamily="2" charset="-78"/>
               </a:rPr>
@@ -10632,7 +10632,7 @@
                 <a:solidFill>
                   <a:srgbClr val="FFFFFF"/>
                 </a:solidFill>
-                <a:latin typeface="Calibri" pitchFamily="34" charset="0"/>
+                <a:latin typeface="Amiri" pitchFamily="2" charset="-78"/>
                 <a:ea typeface="Amiri" pitchFamily="2" charset="-78"/>
                 <a:cs typeface="Amiri" pitchFamily="2" charset="-78"/>
               </a:rPr>
@@ -10698,7 +10698,7 @@
                 <a:solidFill>
                   <a:srgbClr val="FFFFFF"/>
                 </a:solidFill>
-                <a:latin typeface="Calibri" pitchFamily="34" charset="0"/>
+                <a:latin typeface="Amiri" pitchFamily="2" charset="-78"/>
                 <a:ea typeface="Amiri" pitchFamily="2" charset="-78"/>
                 <a:cs typeface="Amiri" pitchFamily="2" charset="-78"/>
               </a:rPr>
@@ -10764,7 +10764,7 @@
                 <a:solidFill>
                   <a:srgbClr val="FFFFFF"/>
                 </a:solidFill>
-                <a:latin typeface="Calibri" pitchFamily="34" charset="0"/>
+                <a:latin typeface="Amiri" pitchFamily="2" charset="-78"/>
                 <a:ea typeface="Amiri" pitchFamily="2" charset="-78"/>
                 <a:cs typeface="Amiri" pitchFamily="2" charset="-78"/>
               </a:rPr>
